--- a/docs/presentations/framework-to-code-mapping-cn.pptx
+++ b/docs/presentations/framework-to-code-mapping-cn.pptx
@@ -3813,7 +3813,7 @@
                 </a:solidFill>
                 <a:latin typeface="Aptos"/>
               </a:rPr>
-              <a:t>1. framework markdown 如何编成 framework_ir.json</a:t>
+              <a:t>1. framework markdown 如何编成 FrameworkModule 与 FrameworkBase / Rule</a:t>
             </a:r>
           </a:p>
           <a:p>
@@ -3829,7 +3829,7 @@
                 </a:solidFill>
                 <a:latin typeface="Aptos"/>
               </a:rPr>
-              <a:t>2. product_spec / implementation_config 如何收敛成 KnowledgeBaseProject</a:t>
+              <a:t>2. product / implementation 如何收敛成五层 canonical graph</a:t>
             </a:r>
           </a:p>
           <a:p>
@@ -3845,7 +3845,7 @@
                 </a:solidFill>
                 <a:latin typeface="Aptos"/>
               </a:rPr>
-              <a:t>3. contract / ui_spec / backend_spec 如何继续驱动 runtime code</a:t>
+              <a:t>3. code layer export 如何继续驱动 runtime code</a:t>
             </a:r>
           </a:p>
           <a:p>
@@ -3861,7 +3861,7 @@
                 </a:solidFill>
                 <a:latin typeface="Aptos"/>
               </a:rPr>
-              <a:t>4. governed_symbol + governance manifest/tree 如何把代码拉回上游</a:t>
+              <a:t>4. governance 派生视图如何把代码对象反查回上游</a:t>
             </a:r>
           </a:p>
         </p:txBody>
@@ -3941,7 +3941,7 @@
                 </a:solidFill>
                 <a:latin typeface="Aptos"/>
               </a:rPr>
-              <a:t>阅读方法：不要先盯某个函数，看“文件链”和“对象链”更快。</a:t>
+              <a:t>阅读方法：先看 canonical 图的 5 层，再去看派生视图和具体函数。</a:t>
             </a:r>
           </a:p>
         </p:txBody>
@@ -3976,7 +3976,7 @@
                 </a:solidFill>
                 <a:latin typeface="Aptos"/>
               </a:rPr>
-              <a:t>生成依据：projects/knowledge_base_basic/generated/* 与当前 runtime / governance 主链。</a:t>
+              <a:t>生成依据：canonical_graph.json + governance_manifest.json + generation_manifest.json。</a:t>
             </a:r>
           </a:p>
         </p:txBody>
@@ -4544,7 +4544,7 @@
                 </a:solidFill>
                 <a:latin typeface="Aptos"/>
               </a:rPr>
-              <a:t>KnowledgeBaseProject</a:t>
+              <a:t>code module export</a:t>
             </a:r>
             <a:br/>
             <a:r>
@@ -4778,7 +4778,11 @@
                 </a:solidFill>
                 <a:latin typeface="Aptos"/>
               </a:rPr>
-              <a:t>generated/* + governance</a:t>
+              <a:t>canonical graph</a:t>
+            </a:r>
+            <a:br/>
+            <a:r>
+              <a:t>+ derived views</a:t>
             </a:r>
           </a:p>
         </p:txBody>
@@ -4958,7 +4962,7 @@
                 </a:solidFill>
                 <a:latin typeface="Aptos"/>
               </a:rPr>
-              <a:t>Product Spec：决定这个项目到底是哪一个具体产品。</a:t>
+              <a:t>Product：决定这个项目到底是哪一个具体产品。</a:t>
             </a:r>
           </a:p>
           <a:p>
@@ -4974,7 +4978,7 @@
                 </a:solidFill>
                 <a:latin typeface="Aptos"/>
               </a:rPr>
-              <a:t>Implementation Config：决定这个产品走哪条实现路径。</a:t>
+              <a:t>Implementation：决定这个产品走哪条实现路径。</a:t>
             </a:r>
           </a:p>
           <a:p>
@@ -4990,7 +4994,7 @@
                 </a:solidFill>
                 <a:latin typeface="Aptos"/>
               </a:rPr>
-              <a:t>Compiled Project：把上游三层压成代码可以消费的稳定结构块。</a:t>
+              <a:t>Code：把上游三层压成 runtime 可以消费的稳定导出面。</a:t>
             </a:r>
           </a:p>
         </p:txBody>
@@ -5154,7 +5158,7 @@
                 </a:solidFill>
                 <a:latin typeface="Aptos"/>
               </a:rPr>
-              <a:t>resolved_modules = 18</a:t>
+              <a:t>canonical layers = 5</a:t>
             </a:r>
           </a:p>
           <a:p>
@@ -5170,7 +5174,7 @@
                 </a:solidFill>
                 <a:latin typeface="Aptos"/>
               </a:rPr>
-              <a:t>configuration_effects = 15</a:t>
+              <a:t>resolved_modules = 18</a:t>
             </a:r>
           </a:p>
           <a:p>
@@ -5186,7 +5190,7 @@
                 </a:solidFill>
                 <a:latin typeface="Aptos"/>
               </a:rPr>
-              <a:t>generated files = 8</a:t>
+              <a:t>configuration_effects = 16</a:t>
             </a:r>
           </a:p>
           <a:p>
@@ -5202,6 +5206,22 @@
                 </a:solidFill>
                 <a:latin typeface="Aptos"/>
               </a:rPr>
+              <a:t>generated files = 9</a:t>
+            </a:r>
+          </a:p>
+          <a:p>
+            <a:pPr algn="l">
+              <a:spcAft>
+                <a:spcPts val="400"/>
+              </a:spcAft>
+            </a:pPr>
+            <a:r>
+              <a:rPr sz="1200">
+                <a:solidFill>
+                  <a:srgbClr val="616771"/>
+                </a:solidFill>
+                <a:latin typeface="Aptos"/>
+              </a:rPr>
               <a:t>所有这些都不是手写说明，而是生成产物的一部分。</a:t>
             </a:r>
           </a:p>
@@ -5237,7 +5257,7 @@
                 </a:solidFill>
                 <a:latin typeface="Aptos"/>
               </a:rPr>
-              <a:t>关键判断：runtime 不是新真相源，而是 KnowledgeBaseProject 的消费者。</a:t>
+              <a:t>关键判断：runtime 不是新真相源，而是 Code layer export 的消费者。</a:t>
             </a:r>
           </a:p>
         </p:txBody>
@@ -5368,7 +5388,7 @@
                 </a:solidFill>
                 <a:latin typeface="Aptos"/>
               </a:rPr>
-              <a:t>它把 framework IR、产品真相和实现细化收成一个 KnowledgeBaseProject，再继续派生 contract / spec / evidence。</a:t>
+              <a:t>它把 framework、product、implementation 收成分层模块，再继续派生 code export 与 evidence。</a:t>
             </a:r>
           </a:p>
         </p:txBody>
@@ -5760,7 +5780,7 @@
                 </a:solidFill>
                 <a:latin typeface="Aptos"/>
               </a:rPr>
-              <a:t>-&gt; KnowledgeBaseProject</a:t>
+              <a:t>-&gt; framework/product/implementation/code</a:t>
             </a:r>
           </a:p>
           <a:p>
@@ -5973,6 +5993,22 @@
                 <a:latin typeface="Aptos"/>
               </a:rPr>
               <a:t>materialize_knowledge_base_project()</a:t>
+            </a:r>
+          </a:p>
+          <a:p>
+            <a:pPr algn="l">
+              <a:spcAft>
+                <a:spcPts val="400"/>
+              </a:spcAft>
+            </a:pPr>
+            <a:r>
+              <a:rPr sz="1200">
+                <a:solidFill>
+                  <a:srgbClr val="616771"/>
+                </a:solidFill>
+                <a:latin typeface="Aptos"/>
+              </a:rPr>
+              <a:t>-&gt; canonical_graph.json</a:t>
             </a:r>
           </a:p>
           <a:p>
@@ -6286,7 +6322,7 @@
                 </a:solidFill>
                 <a:latin typeface="Aptos"/>
               </a:rPr>
-              <a:t>_compile_project()：把上游真相压成 KnowledgeBaseProject。</a:t>
+              <a:t>_compile_project()：把上游真相压成五层模块。</a:t>
             </a:r>
           </a:p>
           <a:p>
@@ -6302,7 +6338,7 @@
                 </a:solidFill>
                 <a:latin typeface="Aptos"/>
               </a:rPr>
-              <a:t>_build_backend_spec() / _build_ui_spec()：把项目对象继续压成运行时规格。</a:t>
+              <a:t>_build_backend_spec() / _build_ui_spec()：把 code layer export 继续压成运行时规格。</a:t>
             </a:r>
           </a:p>
           <a:p>
@@ -6484,7 +6520,7 @@
                 </a:solidFill>
                 <a:latin typeface="Aptos"/>
               </a:rPr>
-              <a:t>仓库当前用 generation_manifest.configuration_effects 把这件事固化成可追踪证据。</a:t>
+              <a:t>仓库当前用 canonical graph + generation_manifest.configuration_effects 把这件事固化成可追踪证据。</a:t>
             </a:r>
           </a:p>
         </p:txBody>
@@ -7217,6 +7253,22 @@
                 <a:latin typeface="Aptos"/>
               </a:rPr>
               <a:t>-&gt; generation_manifest.configuration_effects</a:t>
+            </a:r>
+          </a:p>
+          <a:p>
+            <a:pPr algn="l">
+              <a:spcAft>
+                <a:spcPts val="400"/>
+              </a:spcAft>
+            </a:pPr>
+            <a:r>
+              <a:rPr sz="1200">
+                <a:solidFill>
+                  <a:srgbClr val="616771"/>
+                </a:solidFill>
+                <a:latin typeface="Aptos"/>
+              </a:rPr>
+              <a:t>-&gt; canonical_graph.layers.code.export.implementation_effects</a:t>
             </a:r>
           </a:p>
           <a:p>
@@ -7353,7 +7405,7 @@
                 </a:solidFill>
                 <a:latin typeface="Aptos"/>
               </a:rPr>
-              <a:t>关键例子：evidence.product_spec_endpoint -&gt; backend_spec.transport.product_spec_endpoint -&gt; runtime app route</a:t>
+              <a:t>关键例子：implementation_config -&gt; code layer export -&gt; runtime route。</a:t>
             </a:r>
           </a:p>
         </p:txBody>
@@ -9261,7 +9313,7 @@
                 </a:solidFill>
                 <a:latin typeface="Aptos"/>
               </a:rPr>
-              <a:t>关键文件：src/project_runtime/governance.py 与 projects/knowledge_base_basic/generated/governance_manifest.json</a:t>
+              <a:t>关键文件：src/project_runtime/governance.py 与 canonical_graph / governance_manifest。</a:t>
             </a:r>
           </a:p>
         </p:txBody>
@@ -10512,7 +10564,7 @@
                 </a:solidFill>
                 <a:latin typeface="Aptos"/>
               </a:rPr>
-              <a:t>6 / generation_manifest.json</a:t>
+              <a:t>6 / canonical_graph + generation_manifest</a:t>
             </a:r>
           </a:p>
         </p:txBody>
@@ -10551,7 +10603,7 @@
                 </a:solidFill>
                 <a:latin typeface="Aptos"/>
               </a:rPr>
-              <a:t>configuration_effects 记录这条 effect</a:t>
+              <a:t>code/evidence 层都记录这条 effect</a:t>
             </a:r>
           </a:p>
         </p:txBody>
@@ -10750,7 +10802,7 @@
                 </a:solidFill>
                 <a:latin typeface="Aptos"/>
               </a:rPr>
-              <a:t>这个例子最适合顺着读：route.toml -&gt; implementation_config.toml -&gt; knowledge_base.py -&gt; app.py -&gt; generation_manifest.json</a:t>
+              <a:t>这个例子最适合顺着读：route.toml -&gt; implementation_config.toml -&gt; knowledge_base.py -&gt; app.py -&gt; canonical_graph.json</a:t>
             </a:r>
           </a:p>
         </p:txBody>
@@ -12164,7 +12216,7 @@
                 </a:solidFill>
                 <a:latin typeface="Aptos"/>
               </a:rPr>
-              <a:t>-&gt; generation_manifest.json</a:t>
+              <a:t>-&gt; canonical_graph.json</a:t>
             </a:r>
           </a:p>
           <a:p>
@@ -12573,6 +12625,22 @@
                 <a:latin typeface="Aptos"/>
               </a:rPr>
               <a:t>implementation_config field</a:t>
+            </a:r>
+          </a:p>
+          <a:p>
+            <a:pPr algn="l">
+              <a:spcAft>
+                <a:spcPts val="400"/>
+              </a:spcAft>
+            </a:pPr>
+            <a:r>
+              <a:rPr sz="1200">
+                <a:solidFill>
+                  <a:srgbClr val="616771"/>
+                </a:solidFill>
+                <a:latin typeface="Aptos"/>
+              </a:rPr>
+              <a:t>-&gt; canonical_graph.layers.code.export.implementation_effects</a:t>
             </a:r>
           </a:p>
           <a:p>
